--- a/dist/초6/국어/읽기와비판/초6_국어_읽기와비판_03_근거의타당성_학생용.pptx
+++ b/dist/초6/국어/읽기와비판/초6_국어_읽기와비판_03_근거의타당성_학생용.pptx
@@ -119,13 +119,13 @@
   <p:extLst>
     <p:ext uri="{521415D9-36F7-43E2-AB2F-B90AF26B5E84}">
       <p14:sectionLst xmlns:p14="http://schemas.microsoft.com/office/powerpoint/2010/main">
-        <p14:section name="도입" id="{570f43b5-2b23-8959-c01c-174a8985a184}">
+        <p14:section name="도입" id="{ba53e3c8-c86c-3a39-30e4-9bdb6aa1250c}">
           <p14:sldIdLst>
             <p14:sldId id="256"/>
             <p14:sldId id="257"/>
           </p14:sldIdLst>
         </p14:section>
-        <p14:section name="개념" id="{b3ab5ba0-cdb2-2eeb-0900-70c533494d0c}">
+        <p14:section name="개념" id="{51d73dda-ca7c-4337-585b-f62984f70ff2}">
           <p14:sldIdLst>
             <p14:sldId id="258"/>
             <p14:sldId id="259"/>
@@ -133,25 +133,25 @@
             <p14:sldId id="261"/>
           </p14:sldIdLst>
         </p14:section>
-        <p14:section name="연습" id="{6b7bb89c-261e-c911-3ffb-2c01614a1d5f}">
+        <p14:section name="연습" id="{ceed06f0-2fcc-f30f-e93b-d40b996778ce}">
           <p14:sldIdLst>
             <p14:sldId id="262"/>
             <p14:sldId id="263"/>
             <p14:sldId id="264"/>
           </p14:sldIdLst>
         </p14:section>
-        <p14:section name="확인" id="{959aa03e-69ea-b239-4aba-b507fc309adf}">
+        <p14:section name="확인" id="{0a920846-843d-ff02-e08c-dd9765528cfc}">
           <p14:sldIdLst>
             <p14:sldId id="265"/>
             <p14:sldId id="266"/>
           </p14:sldIdLst>
         </p14:section>
-        <p14:section name="정리" id="{8a2a8851-50a8-d670-a67e-8e8a85306f14}">
+        <p14:section name="정리" id="{9df5ba4a-2079-25f3-082f-56d3b2d7bbba}">
           <p14:sldIdLst>
             <p14:sldId id="267"/>
           </p14:sldIdLst>
         </p14:section>
-        <p14:section name="보충" id="{bf860639-c939-56b8-cc50-975bf8ca4ffb}">
+        <p14:section name="보충" id="{886bfdb5-3db9-2b96-5df9-f57f15f27167}">
           <p14:sldIdLst>
             <p14:sldId id="268"/>
           </p14:sldIdLst>
@@ -6505,7 +6505,7 @@
           </p:nvPr>
         </p:nvGraphicFramePr>
         <p:xfrm>
-          <a:off x="608076" y="2483485"/>
+          <a:off x="608076" y="2439670"/>
           <a:ext cx="10972800" cy="914400"/>
         </p:xfrm>
         <a:graphic>
@@ -6517,7 +6517,7 @@
                 <a:gridCol w="4169664"/>
                 <a:gridCol w="5047488"/>
               </a:tblGrid>
-              <a:tr h="433070">
+              <a:tr h="450596">
                 <a:tc>
                   <a:txBody>
                     <a:bodyPr/>
@@ -6712,7 +6712,7 @@
                   </a:tcPr>
                 </a:tc>
               </a:tr>
-              <a:tr h="433070">
+              <a:tr h="450596">
                 <a:tc>
                   <a:txBody>
                     <a:bodyPr/>
@@ -6918,7 +6918,7 @@
                   </a:tcPr>
                 </a:tc>
               </a:tr>
-              <a:tr h="433070">
+              <a:tr h="450596">
                 <a:tc>
                   <a:txBody>
                     <a:bodyPr/>
@@ -7124,7 +7124,7 @@
                   </a:tcPr>
                 </a:tc>
               </a:tr>
-              <a:tr h="433070">
+              <a:tr h="450596">
                 <a:tc>
                   <a:txBody>
                     <a:bodyPr/>
@@ -7330,7 +7330,7 @@
                   </a:tcPr>
                 </a:tc>
               </a:tr>
-              <a:tr h="433070">
+              <a:tr h="450596">
                 <a:tc>
                   <a:txBody>
                     <a:bodyPr/>
